--- a/Fig/涵道结构.pptx
+++ b/Fig/涵道结构.pptx
@@ -3114,15 +3114,18 @@
         </p:nvCxnSpPr>
         <p:spPr>
           <a:xfrm flipH="1">
-            <a:off x="1432560" y="500380"/>
-            <a:ext cx="523875" cy="109220"/>
+            <a:off x="1554480" y="500380"/>
+            <a:ext cx="401955" cy="123825"/>
           </a:xfrm>
           <a:prstGeom prst="straightConnector1">
             <a:avLst/>
           </a:prstGeom>
           <a:ln w="19050" cap="rnd">
             <a:solidFill>
-              <a:srgbClr val="00B050"/>
+              <a:schemeClr val="accent1">
+                <a:lumMod val="60000"/>
+                <a:lumOff val="40000"/>
+              </a:schemeClr>
             </a:solidFill>
             <a:round/>
             <a:tailEnd type="triangle" w="med" len="med"/>
@@ -3161,7 +3164,10 @@
           </a:prstGeom>
           <a:ln w="19050" cap="rnd">
             <a:solidFill>
-              <a:srgbClr val="00B050"/>
+              <a:schemeClr val="accent1">
+                <a:lumMod val="60000"/>
+                <a:lumOff val="40000"/>
+              </a:schemeClr>
             </a:solidFill>
             <a:round/>
             <a:tailEnd type="triangle" w="med" len="med"/>
@@ -3200,7 +3206,10 @@
           </a:prstGeom>
           <a:ln w="19050" cap="rnd">
             <a:solidFill>
-              <a:srgbClr val="00B050"/>
+              <a:schemeClr val="accent1">
+                <a:lumMod val="60000"/>
+                <a:lumOff val="40000"/>
+              </a:schemeClr>
             </a:solidFill>
             <a:round/>
             <a:tailEnd type="triangle" w="med" len="med"/>
@@ -3239,7 +3248,10 @@
           </a:prstGeom>
           <a:ln w="19050" cap="rnd">
             <a:solidFill>
-              <a:srgbClr val="00B050"/>
+              <a:schemeClr val="accent1">
+                <a:lumMod val="60000"/>
+                <a:lumOff val="40000"/>
+              </a:schemeClr>
             </a:solidFill>
             <a:round/>
             <a:tailEnd type="triangle" w="med" len="med"/>
@@ -3278,7 +3290,10 @@
           </a:prstGeom>
           <a:ln w="19050" cap="rnd">
             <a:solidFill>
-              <a:srgbClr val="00B050"/>
+              <a:schemeClr val="accent1">
+                <a:lumMod val="60000"/>
+                <a:lumOff val="40000"/>
+              </a:schemeClr>
             </a:solidFill>
             <a:round/>
             <a:tailEnd type="triangle" w="med" len="med"/>
@@ -3317,7 +3332,10 @@
           </a:prstGeom>
           <a:ln w="19050" cmpd="sng">
             <a:solidFill>
-              <a:srgbClr val="00B050"/>
+              <a:schemeClr val="accent1">
+                <a:lumMod val="60000"/>
+                <a:lumOff val="40000"/>
+              </a:schemeClr>
             </a:solidFill>
             <a:prstDash val="solid"/>
             <a:tailEnd type="triangle" w="med" len="med"/>
@@ -3356,7 +3374,10 @@
           </a:prstGeom>
           <a:ln w="19050" cmpd="sng">
             <a:solidFill>
-              <a:srgbClr val="00B050"/>
+              <a:schemeClr val="accent1">
+                <a:lumMod val="60000"/>
+                <a:lumOff val="40000"/>
+              </a:schemeClr>
             </a:solidFill>
             <a:prstDash val="solid"/>
             <a:tailEnd type="triangle" w="med" len="med"/>
@@ -3392,7 +3413,10 @@
             <a:avLst/>
           </a:prstGeom>
           <a:solidFill>
-            <a:schemeClr val="accent6"/>
+            <a:schemeClr val="accent5">
+              <a:lumMod val="20000"/>
+              <a:lumOff val="80000"/>
+            </a:schemeClr>
           </a:solidFill>
         </p:spPr>
         <p:txBody>
@@ -3407,7 +3431,7 @@
             <a:r>
               <a:rPr lang="zh-CN" altLang="en-US" sz="900">
                 <a:solidFill>
-                  <a:schemeClr val="bg1"/>
+                  <a:schemeClr val="tx1"/>
                 </a:solidFill>
                 <a:effectLst/>
                 <a:latin typeface="宋体" panose="02010600030101010101" pitchFamily="2" charset="-122"/>
@@ -3417,7 +3441,7 @@
             </a:r>
             <a:endParaRPr lang="zh-CN" altLang="en-US" sz="900">
               <a:solidFill>
-                <a:schemeClr val="bg1"/>
+                <a:schemeClr val="tx1"/>
               </a:solidFill>
               <a:effectLst/>
               <a:latin typeface="宋体" panose="02010600030101010101" pitchFamily="2" charset="-122"/>
@@ -3441,7 +3465,10 @@
             <a:avLst/>
           </a:prstGeom>
           <a:solidFill>
-            <a:schemeClr val="accent6"/>
+            <a:schemeClr val="accent5">
+              <a:lumMod val="20000"/>
+              <a:lumOff val="80000"/>
+            </a:schemeClr>
           </a:solidFill>
         </p:spPr>
         <p:txBody>
@@ -3457,7 +3484,7 @@
             <a:r>
               <a:rPr lang="zh-CN" altLang="en-US" sz="900">
                 <a:solidFill>
-                  <a:schemeClr val="bg1"/>
+                  <a:schemeClr val="tx1"/>
                 </a:solidFill>
                 <a:effectLst/>
                 <a:latin typeface="宋体" panose="02010600030101010101" pitchFamily="2" charset="-122"/>
@@ -3467,7 +3494,7 @@
             </a:r>
             <a:endParaRPr lang="zh-CN" altLang="en-US" sz="900">
               <a:solidFill>
-                <a:schemeClr val="bg1"/>
+                <a:schemeClr val="tx1"/>
               </a:solidFill>
               <a:effectLst/>
               <a:latin typeface="宋体" panose="02010600030101010101" pitchFamily="2" charset="-122"/>
@@ -3491,7 +3518,10 @@
             <a:avLst/>
           </a:prstGeom>
           <a:solidFill>
-            <a:schemeClr val="accent6"/>
+            <a:schemeClr val="accent5">
+              <a:lumMod val="20000"/>
+              <a:lumOff val="80000"/>
+            </a:schemeClr>
           </a:solidFill>
         </p:spPr>
         <p:txBody>
@@ -3506,7 +3536,7 @@
             <a:r>
               <a:rPr lang="zh-CN" altLang="en-US" sz="900">
                 <a:solidFill>
-                  <a:schemeClr val="bg1"/>
+                  <a:schemeClr val="tx1"/>
                 </a:solidFill>
                 <a:effectLst/>
                 <a:latin typeface="宋体" panose="02010600030101010101" pitchFamily="2" charset="-122"/>
@@ -3516,7 +3546,7 @@
             </a:r>
             <a:endParaRPr lang="zh-CN" altLang="en-US" sz="900">
               <a:solidFill>
-                <a:schemeClr val="bg1"/>
+                <a:schemeClr val="tx1"/>
               </a:solidFill>
               <a:effectLst/>
               <a:latin typeface="宋体" panose="02010600030101010101" pitchFamily="2" charset="-122"/>
@@ -3543,7 +3573,10 @@
           </a:prstGeom>
           <a:ln w="19050" cmpd="sng">
             <a:solidFill>
-              <a:srgbClr val="00B050"/>
+              <a:schemeClr val="accent1">
+                <a:lumMod val="60000"/>
+                <a:lumOff val="40000"/>
+              </a:schemeClr>
             </a:solidFill>
             <a:prstDash val="solid"/>
             <a:tailEnd type="triangle" w="med" len="med"/>
@@ -3579,7 +3612,10 @@
             <a:avLst/>
           </a:prstGeom>
           <a:solidFill>
-            <a:schemeClr val="accent6"/>
+            <a:schemeClr val="accent5">
+              <a:lumMod val="20000"/>
+              <a:lumOff val="80000"/>
+            </a:schemeClr>
           </a:solidFill>
         </p:spPr>
         <p:txBody>
@@ -3594,7 +3630,7 @@
             <a:r>
               <a:rPr lang="zh-CN" altLang="en-US" sz="900">
                 <a:solidFill>
-                  <a:schemeClr val="bg1"/>
+                  <a:schemeClr val="tx1"/>
                 </a:solidFill>
                 <a:effectLst/>
                 <a:latin typeface="宋体" panose="02010600030101010101" pitchFamily="2" charset="-122"/>
@@ -3604,7 +3640,7 @@
             </a:r>
             <a:endParaRPr lang="zh-CN" altLang="en-US" sz="900">
               <a:solidFill>
-                <a:schemeClr val="bg1"/>
+                <a:schemeClr val="tx1"/>
               </a:solidFill>
               <a:effectLst/>
               <a:latin typeface="宋体" panose="02010600030101010101" pitchFamily="2" charset="-122"/>
@@ -3628,7 +3664,10 @@
             <a:avLst/>
           </a:prstGeom>
           <a:solidFill>
-            <a:schemeClr val="accent6"/>
+            <a:schemeClr val="accent5">
+              <a:lumMod val="20000"/>
+              <a:lumOff val="80000"/>
+            </a:schemeClr>
           </a:solidFill>
         </p:spPr>
         <p:txBody>
@@ -3643,7 +3682,7 @@
             <a:r>
               <a:rPr lang="zh-CN" altLang="en-US" sz="900">
                 <a:solidFill>
-                  <a:schemeClr val="bg1"/>
+                  <a:schemeClr val="tx1"/>
                 </a:solidFill>
                 <a:effectLst/>
                 <a:latin typeface="宋体" panose="02010600030101010101" pitchFamily="2" charset="-122"/>
@@ -3653,7 +3692,7 @@
             </a:r>
             <a:endParaRPr lang="zh-CN" altLang="en-US" sz="900">
               <a:solidFill>
-                <a:schemeClr val="bg1"/>
+                <a:schemeClr val="tx1"/>
               </a:solidFill>
               <a:effectLst/>
               <a:latin typeface="宋体" panose="02010600030101010101" pitchFamily="2" charset="-122"/>
@@ -3677,7 +3716,10 @@
             <a:avLst/>
           </a:prstGeom>
           <a:solidFill>
-            <a:schemeClr val="accent6"/>
+            <a:schemeClr val="accent5">
+              <a:lumMod val="20000"/>
+              <a:lumOff val="80000"/>
+            </a:schemeClr>
           </a:solidFill>
         </p:spPr>
         <p:txBody>
@@ -3692,7 +3734,7 @@
             <a:r>
               <a:rPr lang="zh-CN" altLang="en-US" sz="900">
                 <a:solidFill>
-                  <a:schemeClr val="bg1"/>
+                  <a:schemeClr val="tx1"/>
                 </a:solidFill>
                 <a:effectLst/>
                 <a:latin typeface="宋体" panose="02010600030101010101" pitchFamily="2" charset="-122"/>
@@ -3702,7 +3744,7 @@
             </a:r>
             <a:endParaRPr lang="zh-CN" altLang="en-US" sz="900">
               <a:solidFill>
-                <a:schemeClr val="bg1"/>
+                <a:schemeClr val="tx1"/>
               </a:solidFill>
               <a:effectLst/>
               <a:latin typeface="宋体" panose="02010600030101010101" pitchFamily="2" charset="-122"/>
@@ -3726,7 +3768,10 @@
             <a:avLst/>
           </a:prstGeom>
           <a:solidFill>
-            <a:schemeClr val="accent6"/>
+            <a:schemeClr val="accent5">
+              <a:lumMod val="20000"/>
+              <a:lumOff val="80000"/>
+            </a:schemeClr>
           </a:solidFill>
         </p:spPr>
         <p:txBody>
@@ -3741,7 +3786,7 @@
             <a:r>
               <a:rPr lang="zh-CN" altLang="en-US" sz="900">
                 <a:solidFill>
-                  <a:schemeClr val="bg1"/>
+                  <a:schemeClr val="tx1"/>
                 </a:solidFill>
                 <a:effectLst/>
                 <a:latin typeface="宋体" panose="02010600030101010101" pitchFamily="2" charset="-122"/>
@@ -3751,7 +3796,7 @@
             </a:r>
             <a:endParaRPr lang="zh-CN" altLang="en-US" sz="900">
               <a:solidFill>
-                <a:schemeClr val="bg1"/>
+                <a:schemeClr val="tx1"/>
               </a:solidFill>
               <a:effectLst/>
               <a:latin typeface="宋体" panose="02010600030101010101" pitchFamily="2" charset="-122"/>
@@ -3775,7 +3820,10 @@
             <a:avLst/>
           </a:prstGeom>
           <a:solidFill>
-            <a:schemeClr val="accent6"/>
+            <a:schemeClr val="accent5">
+              <a:lumMod val="20000"/>
+              <a:lumOff val="80000"/>
+            </a:schemeClr>
           </a:solidFill>
         </p:spPr>
         <p:txBody>
@@ -3790,7 +3838,7 @@
             <a:r>
               <a:rPr lang="zh-CN" altLang="en-US" sz="900">
                 <a:solidFill>
-                  <a:schemeClr val="bg1"/>
+                  <a:schemeClr val="tx1"/>
                 </a:solidFill>
                 <a:effectLst/>
                 <a:latin typeface="宋体" panose="02010600030101010101" pitchFamily="2" charset="-122"/>
@@ -3800,7 +3848,7 @@
             </a:r>
             <a:endParaRPr lang="zh-CN" altLang="en-US" sz="900">
               <a:solidFill>
-                <a:schemeClr val="bg1"/>
+                <a:schemeClr val="tx1"/>
               </a:solidFill>
               <a:effectLst/>
               <a:latin typeface="宋体" panose="02010600030101010101" pitchFamily="2" charset="-122"/>
